--- a/write/507-ppt/examples/presentation-pairwise.pptx
+++ b/write/507-ppt/examples/presentation-pairwise.pptx
@@ -5,17 +5,17 @@
     <p:sldMasterId xmlns:r="http://schemas.openxmlformats.org/officeDocument/2006/relationships" id="2147483648" r:id="rId1"/>
   </p:sldMasterIdLst>
   <p:notesMasterIdLst>
-    <p:notesMasterId r:id="R9a5217c6ec6c45bb"/>
+    <p:notesMasterId r:id="Rdd141bf92787417e"/>
   </p:notesMasterIdLst>
   <p:sldIdLst>
-    <p:sldId id="256" r:id="Rfc534a876ec547bb"/>
-    <p:sldId id="257" r:id="R206b3b507b9f4f54"/>
-    <p:sldId id="258" r:id="Rcdf251a2d13b4367"/>
-    <p:sldId id="259" r:id="R8ddd2cb376604568"/>
-    <p:sldId id="260" r:id="Rf8e428993d0a4b28"/>
-    <p:sldId id="261" r:id="R382b5a445f6c4d0e"/>
-    <p:sldId id="262" r:id="R7a9fb9bff1924979"/>
-    <p:sldId id="263" r:id="R31f0fad27aa84c59"/>
+    <p:sldId id="256" r:id="Ra093fe3a041f4e61"/>
+    <p:sldId id="257" r:id="Rc39bc4c4c4884ff2"/>
+    <p:sldId id="258" r:id="Rbfe9a33426114681"/>
+    <p:sldId id="259" r:id="R6121c4685a194f23"/>
+    <p:sldId id="260" r:id="R9a59835844e246e8"/>
+    <p:sldId id="261" r:id="R74d66cc3351c47c2"/>
+    <p:sldId id="262" r:id="Rd1780322762c4137"/>
+    <p:sldId id="263" r:id="R2628ee92eb464f1a"/>
   </p:sldIdLst>
   <p:sldSz cx="12192000" cy="6858000"/>
   <p:notesSz cx="6858000" cy="9144000"/>
@@ -2178,7 +2178,7 @@
         </p:xfrm>
         <a:graphic xmlns:a="http://schemas.openxmlformats.org/drawingml/2006/main">
           <a:graphicData uri="http://schemas.openxmlformats.org/drawingml/2006/chart">
-            <c:chart xmlns:r="http://schemas.openxmlformats.org/officeDocument/2006/relationships" xmlns:c="http://schemas.openxmlformats.org/drawingml/2006/chart" r:id="R2c3b8dacfa384528"/>
+            <c:chart xmlns:r="http://schemas.openxmlformats.org/officeDocument/2006/relationships" xmlns:c="http://schemas.openxmlformats.org/drawingml/2006/chart" r:id="R12f153259c4047b3"/>
           </a:graphicData>
         </a:graphic>
       </p:graphicFrame>
@@ -2815,10 +2815,10 @@
           <p:nvPr/>
         </p:nvPicPr>
         <p:blipFill>
-          <a:blip xmlns:r="http://schemas.openxmlformats.org/officeDocument/2006/relationships" xmlns:a="http://schemas.openxmlformats.org/drawingml/2006/main" r:embed="R4ca19983a3194ec5">
+          <a:blip xmlns:r="http://schemas.openxmlformats.org/officeDocument/2006/relationships" xmlns:a="http://schemas.openxmlformats.org/drawingml/2006/main" r:embed="R9d5ce2cd9c6d4afe">
             <a:extLst>
               <a:ext uri="{96DAC541-7B7A-43D3-8B79-37D633B846F1}">
-                <asvg:svgBlip xmlns:asvg="http://schemas.microsoft.com/office/drawing/2016/SVG/main" r:embed="Rb76336e57a8142fe"/>
+                <asvg:svgBlip xmlns:asvg="http://schemas.microsoft.com/office/drawing/2016/SVG/main" r:embed="R9f8309161d794c58"/>
               </a:ext>
             </a:extLst>
           </a:blip>
@@ -2828,8 +2828,8 @@
         </p:blipFill>
         <p:spPr>
           <a:xfrm xmlns:a="http://schemas.openxmlformats.org/drawingml/2006/main">
-            <a:off x="4140000" y="900000"/>
-            <a:ext cx="5220000" cy="3528000"/>
+            <a:off x="4140000" y="1195877"/>
+            <a:ext cx="5220000" cy="2936250"/>
           </a:xfrm>
           <a:prstGeom xmlns:a="http://schemas.openxmlformats.org/drawingml/2006/main" prst="rect">
             <a:avLst/>
@@ -3134,10 +3134,10 @@
           <p:nvPr/>
         </p:nvPicPr>
         <p:blipFill>
-          <a:blip xmlns:r="http://schemas.openxmlformats.org/officeDocument/2006/relationships" xmlns:a="http://schemas.openxmlformats.org/drawingml/2006/main" r:embed="R12d79b306c0343ae">
+          <a:blip xmlns:r="http://schemas.openxmlformats.org/officeDocument/2006/relationships" xmlns:a="http://schemas.openxmlformats.org/drawingml/2006/main" r:embed="R615a3df2dcdc45a0">
             <a:extLst>
               <a:ext uri="{96DAC541-7B7A-43D3-8B79-37D633B846F1}">
-                <asvg:svgBlip xmlns:asvg="http://schemas.microsoft.com/office/drawing/2016/SVG/main" r:embed="R4c0b84af108b48f6"/>
+                <asvg:svgBlip xmlns:asvg="http://schemas.microsoft.com/office/drawing/2016/SVG/main" r:embed="R2513ef05299f4221"/>
               </a:ext>
             </a:extLst>
           </a:blip>
@@ -3147,8 +3147,8 @@
         </p:blipFill>
         <p:spPr>
           <a:xfrm xmlns:a="http://schemas.openxmlformats.org/drawingml/2006/main">
-            <a:off x="4680000" y="1296000"/>
-            <a:ext cx="1476000" cy="2088000"/>
+            <a:off x="4680000" y="1924873"/>
+            <a:ext cx="1476000" cy="830250"/>
           </a:xfrm>
           <a:prstGeom xmlns:a="http://schemas.openxmlformats.org/drawingml/2006/main" prst="rect">
             <a:avLst/>
@@ -3198,10 +3198,10 @@
           <p:nvPr/>
         </p:nvPicPr>
         <p:blipFill>
-          <a:blip xmlns:r="http://schemas.openxmlformats.org/officeDocument/2006/relationships" xmlns:a="http://schemas.openxmlformats.org/drawingml/2006/main" r:embed="R43f539d542e941c9">
+          <a:blip xmlns:r="http://schemas.openxmlformats.org/officeDocument/2006/relationships" xmlns:a="http://schemas.openxmlformats.org/drawingml/2006/main" r:embed="Rb42a11a72765441a">
             <a:extLst>
               <a:ext uri="{96DAC541-7B7A-43D3-8B79-37D633B846F1}">
-                <asvg:svgBlip xmlns:asvg="http://schemas.microsoft.com/office/drawing/2016/SVG/main" r:embed="R65890d58f7ba4236"/>
+                <asvg:svgBlip xmlns:asvg="http://schemas.microsoft.com/office/drawing/2016/SVG/main" r:embed="R5f94cfdccbc64765"/>
               </a:ext>
             </a:extLst>
           </a:blip>
@@ -3211,8 +3211,8 @@
         </p:blipFill>
         <p:spPr>
           <a:xfrm xmlns:a="http://schemas.openxmlformats.org/drawingml/2006/main">
-            <a:off x="6282000" y="1296000"/>
-            <a:ext cx="1476000" cy="2088000"/>
+            <a:off x="6282000" y="1924873"/>
+            <a:ext cx="1476000" cy="830250"/>
           </a:xfrm>
           <a:prstGeom xmlns:a="http://schemas.openxmlformats.org/drawingml/2006/main" prst="rect">
             <a:avLst/>
@@ -3262,10 +3262,10 @@
           <p:nvPr/>
         </p:nvPicPr>
         <p:blipFill>
-          <a:blip xmlns:r="http://schemas.openxmlformats.org/officeDocument/2006/relationships" xmlns:a="http://schemas.openxmlformats.org/drawingml/2006/main" r:embed="R2b48b2d4aa524177">
+          <a:blip xmlns:r="http://schemas.openxmlformats.org/officeDocument/2006/relationships" xmlns:a="http://schemas.openxmlformats.org/drawingml/2006/main" r:embed="R3c1b703af3db457a">
             <a:extLst>
               <a:ext uri="{96DAC541-7B7A-43D3-8B79-37D633B846F1}">
-                <asvg:svgBlip xmlns:asvg="http://schemas.microsoft.com/office/drawing/2016/SVG/main" r:embed="R35083e8d62824733"/>
+                <asvg:svgBlip xmlns:asvg="http://schemas.microsoft.com/office/drawing/2016/SVG/main" r:embed="R5d9399f41c554fec"/>
               </a:ext>
             </a:extLst>
           </a:blip>
@@ -3275,8 +3275,8 @@
         </p:blipFill>
         <p:spPr>
           <a:xfrm xmlns:a="http://schemas.openxmlformats.org/drawingml/2006/main">
-            <a:off x="7884000" y="1296000"/>
-            <a:ext cx="1476000" cy="2088000"/>
+            <a:off x="7884000" y="1924873"/>
+            <a:ext cx="1476000" cy="830250"/>
           </a:xfrm>
           <a:prstGeom xmlns:a="http://schemas.openxmlformats.org/drawingml/2006/main" prst="rect">
             <a:avLst/>
